--- a/output/LINK. kennismaking Techmetric3d.pptx
+++ b/output/LINK. kennismaking Techmetric3d.pptx
@@ -8276,7 +8276,7 @@
                 <a:ea typeface="Arial" pitchFamily="34" charset="-122"/>
                 <a:cs typeface="Arial" pitchFamily="34" charset="-120"/>
               </a:rPr>
-              <a:t>Totale investering € 4.500 excl. btw, dat is € 375 per gekwalificeerde afspraak</a:t>
+              <a:t>Totale investering € 5.495 excl. btw: eenmalige kick-off fee van € 995 plus drie werkperiodes van € 1.500</a:t>
             </a:r>
             <a:endParaRPr lang="en-US" sz="900" dirty="0"/>
           </a:p>
@@ -8399,7 +8399,7 @@
                 <a:ea typeface="Arial" pitchFamily="34" charset="-122"/>
                 <a:cs typeface="Arial" pitchFamily="34" charset="-120"/>
               </a:rPr>
-              <a:t>2 WEKEN</a:t>
+              <a:t>2 WEKEN · EENMALIG € 995</a:t>
             </a:r>
             <a:endParaRPr lang="en-US" sz="750" dirty="0"/>
           </a:p>

--- a/output/LINK. kennismaking Techmetric3d.pptx
+++ b/output/LINK. kennismaking Techmetric3d.pptx
@@ -8276,7 +8276,7 @@
                 <a:ea typeface="Arial" pitchFamily="34" charset="-122"/>
                 <a:cs typeface="Arial" pitchFamily="34" charset="-120"/>
               </a:rPr>
-              <a:t>Totale investering € 5.495 excl. btw: eenmalige kick-off fee van € 995 plus drie werkperiodes van € 1.500</a:t>
+              <a:t>Werkperiodes samen € 4.500 excl. btw, dat is € 375 per gekwalificeerde afspraak. De kick-off fee van € 995 staat hier eenmalig los van.</a:t>
             </a:r>
             <a:endParaRPr lang="en-US" sz="900" dirty="0"/>
           </a:p>

--- a/output/LINK. kennismaking Techmetric3d.pptx
+++ b/output/LINK. kennismaking Techmetric3d.pptx
@@ -4555,7 +4555,7 @@
                 <a:ea typeface="Arial" pitchFamily="34" charset="-122"/>
                 <a:cs typeface="Arial" pitchFamily="34" charset="-120"/>
               </a:rPr>
-              <a:t>Vanaf de eerste maandag na de kick-off bellen we dagelijks. Elke afspraak krijgt een bevestigingsmail naar de prospect en een overdracht met context naar jullie.</a:t>
+              <a:t>Vanaf de eerste maandag na de kick-off gaan we bellen, op de dagen en dagdelen die in onze data het beste werken voor jullie branche. Elke afspraak krijgt een bevestigingsmail naar de prospect en een overdracht met context naar jullie.</a:t>
             </a:r>
             <a:endParaRPr lang="en-US" sz="900" dirty="0"/>
           </a:p>

--- a/output/LINK. kennismaking Techmetric3d.pptx
+++ b/output/LINK. kennismaking Techmetric3d.pptx
@@ -2915,7 +2915,7 @@
                 <a:ea typeface="Arial" pitchFamily="34" charset="-122"/>
                 <a:cs typeface="Arial" pitchFamily="34" charset="-120"/>
               </a:rPr>
-              <a:t>Eén persoon die jullie campagne kent, van script tot rapportage.</a:t>
+              <a:t>Eén persoon die jullie campagne kent, van kick-off tot rapportage.</a:t>
             </a:r>
             <a:endParaRPr lang="en-US" sz="950" dirty="0"/>
           </a:p>
@@ -4388,7 +4388,7 @@
                 <a:ea typeface="Arial" pitchFamily="34" charset="-122"/>
                 <a:cs typeface="Arial" pitchFamily="34" charset="-120"/>
               </a:rPr>
-              <a:t>Samen scherp: doelgroep, beslisser, propositie, bezwaren en wat een goede afspraak voor jullie is. Wij schrijven het belscript en de mails, jullie keuren goed.</a:t>
+              <a:t>Samen scherp: doelgroep, beslisser, propositie, bezwaren en wat een goede afspraak voor jullie is. Wij leggen de USP's en de mails vast, jullie keuren goed.</a:t>
             </a:r>
             <a:endParaRPr lang="en-US" sz="900" dirty="0"/>
           </a:p>
@@ -8441,7 +8441,7 @@
                 <a:ea typeface="Arial" pitchFamily="34" charset="-122"/>
                 <a:cs typeface="Arial" pitchFamily="34" charset="-120"/>
               </a:rPr>
-              <a:t>Doelgroep, script, lijst, uitsluitingen</a:t>
+              <a:t>Doelgroep, USP's, lijst, uitsluitingen</a:t>
             </a:r>
             <a:endParaRPr lang="en-US" sz="850" dirty="0"/>
           </a:p>
@@ -9594,7 +9594,7 @@
                 <a:ea typeface="Arial" pitchFamily="34" charset="-122"/>
                 <a:cs typeface="Arial" pitchFamily="34" charset="-120"/>
               </a:rPr>
-              <a:t>Goedkeuring script en mails</a:t>
+              <a:t>Goedkeuring USP's en mails</a:t>
             </a:r>
             <a:endParaRPr lang="en-US" sz="1450" dirty="0"/>
           </a:p>
